--- a/Sy_Unet_CNN.pptx
+++ b/Sy_Unet_CNN.pptx
@@ -2853,7 +2853,7 @@
           </a:ln>
           <a:extLst>
             <a:ext uri="{C572A759-6A51-4108-AA02-DFA0A04FC94B}">
-              <ma14:wrappingTextBoxFlag xmlns:ma14="http://schemas.microsoft.com/office/mac/drawingml/2011/main" xmlns="" val="1"/>
+              <ma14:wrappingTextBoxFlag xmlns="" xmlns:ma14="http://schemas.microsoft.com/office/mac/drawingml/2011/main" val="1"/>
             </a:ext>
           </a:extLst>
         </p:spPr>
@@ -3237,7 +3237,7 @@
           </a:ln>
           <a:extLst>
             <a:ext uri="{C572A759-6A51-4108-AA02-DFA0A04FC94B}">
-              <ma14:wrappingTextBoxFlag xmlns:ma14="http://schemas.microsoft.com/office/mac/drawingml/2011/main" xmlns="" val="1"/>
+              <ma14:wrappingTextBoxFlag xmlns="" xmlns:ma14="http://schemas.microsoft.com/office/mac/drawingml/2011/main" val="1"/>
             </a:ext>
           </a:extLst>
         </p:spPr>
@@ -3625,7 +3625,7 @@
           </a:ln>
           <a:extLst>
             <a:ext uri="{C572A759-6A51-4108-AA02-DFA0A04FC94B}">
-              <ma14:wrappingTextBoxFlag xmlns:ma14="http://schemas.microsoft.com/office/mac/drawingml/2011/main" xmlns="" val="1"/>
+              <ma14:wrappingTextBoxFlag xmlns="" xmlns:ma14="http://schemas.microsoft.com/office/mac/drawingml/2011/main" val="1"/>
             </a:ext>
           </a:extLst>
         </p:spPr>
